--- a/CNC-Plasma/assets/downloads/module-03-classroom.pptx
+++ b/CNC-Plasma/assets/downloads/module-03-classroom.pptx
@@ -2,20 +2,20 @@
 <file path=ppt/presentation.xml><?xml version="1.0" encoding="utf-8"?>
 <p:presentation xmlns:p="http://schemas.openxmlformats.org/presentationml/2006/main">
   <p:sldMasterIdLst>
-    <p:sldMasterId xmlns:r="http://schemas.openxmlformats.org/officeDocument/2006/relationships" id="2147483648" r:id="R44bda1b32ee740ed"/>
+    <p:sldMasterId xmlns:r="http://schemas.openxmlformats.org/officeDocument/2006/relationships" id="2147483648" r:id="R1b3ff036b68f4b57"/>
   </p:sldMasterIdLst>
   <p:notesMasterIdLst>
-    <p:notesMasterId xmlns:r="http://schemas.openxmlformats.org/officeDocument/2006/relationships" r:id="R317a56ebf21c44cc"/>
+    <p:notesMasterId xmlns:r="http://schemas.openxmlformats.org/officeDocument/2006/relationships" r:id="Rddd7b7be977f40cc"/>
   </p:notesMasterIdLst>
   <p:sldIdLst>
-    <p:sldId xmlns:r="http://schemas.openxmlformats.org/officeDocument/2006/relationships" id="256" r:id="R5216865448d344a1"/>
-    <p:sldId xmlns:r="http://schemas.openxmlformats.org/officeDocument/2006/relationships" id="257" r:id="Rb5cdc67158c0495b"/>
-    <p:sldId xmlns:r="http://schemas.openxmlformats.org/officeDocument/2006/relationships" id="258" r:id="Rb698da28a9b9455f"/>
-    <p:sldId xmlns:r="http://schemas.openxmlformats.org/officeDocument/2006/relationships" id="259" r:id="R8498f00ca9e84dfa"/>
-    <p:sldId xmlns:r="http://schemas.openxmlformats.org/officeDocument/2006/relationships" id="260" r:id="R13160ba5ca024f26"/>
-    <p:sldId xmlns:r="http://schemas.openxmlformats.org/officeDocument/2006/relationships" id="261" r:id="R35fa4278b2b3417d"/>
-    <p:sldId xmlns:r="http://schemas.openxmlformats.org/officeDocument/2006/relationships" id="262" r:id="R46c1fc3131af49cb"/>
-    <p:sldId xmlns:r="http://schemas.openxmlformats.org/officeDocument/2006/relationships" id="263" r:id="R97a5ccb4499a4e6a"/>
+    <p:sldId xmlns:r="http://schemas.openxmlformats.org/officeDocument/2006/relationships" id="256" r:id="R736a88fe4229430b"/>
+    <p:sldId xmlns:r="http://schemas.openxmlformats.org/officeDocument/2006/relationships" id="257" r:id="R05378f798b4942ab"/>
+    <p:sldId xmlns:r="http://schemas.openxmlformats.org/officeDocument/2006/relationships" id="258" r:id="R8fd145db2fdf438c"/>
+    <p:sldId xmlns:r="http://schemas.openxmlformats.org/officeDocument/2006/relationships" id="259" r:id="R6f55e2f1ecd74853"/>
+    <p:sldId xmlns:r="http://schemas.openxmlformats.org/officeDocument/2006/relationships" id="260" r:id="R32aae10c5e564e8c"/>
+    <p:sldId xmlns:r="http://schemas.openxmlformats.org/officeDocument/2006/relationships" id="261" r:id="R623f6b832640446d"/>
+    <p:sldId xmlns:r="http://schemas.openxmlformats.org/officeDocument/2006/relationships" id="262" r:id="Rbb306fc08dc842f3"/>
+    <p:sldId xmlns:r="http://schemas.openxmlformats.org/officeDocument/2006/relationships" id="263" r:id="R94941451a6534bb3"/>
   </p:sldIdLst>
   <p:sldSz cx="12192000" cy="6858000"/>
   <p:notesSz cx="6858000" cy="9144000"/>
@@ -472,6 +472,26 @@
               <a:t>Source: Surecontrol Software Manual_Draft4.pdf</a:t>
             </a:r>
           </a:p>
+          <a:p xmlns:a="http://schemas.openxmlformats.org/drawingml/2006/main">
+            <a:r>
+              <a:t/>
+            </a:r>
+          </a:p>
+          <a:p xmlns:a="http://schemas.openxmlformats.org/drawingml/2006/main">
+            <a:r>
+              <a:t/>
+            </a:r>
+          </a:p>
+          <a:p xmlns:a="http://schemas.openxmlformats.org/drawingml/2006/main">
+            <a:r>
+              <a:t>ILLUSTRATIVE IMAGE</a:t>
+            </a:r>
+          </a:p>
+          <a:p xmlns:a="http://schemas.openxmlformats.org/drawingml/2006/main">
+            <a:r>
+              <a:t>AI-generated concept illustration for Prepare the production file. This illustration supports discussion and is not a photograph of the school installation, a software screenshot, or a machine-setting guide. Original source reference images remain on this slide where present.</a:t>
+            </a:r>
+          </a:p>
         </p:txBody>
       </p:sp>
       <p:sp>
@@ -557,6 +577,26 @@
               <a:t>m03-s03: Evaluate a proposed handoff containing a tidy nest, two differently dated DXFs and a file named ready-to-cut.tap, but no revision record. Explain how you would make the handoff useful without claiming machine approval.</a:t>
             </a:r>
           </a:p>
+          <a:p xmlns:a="http://schemas.openxmlformats.org/drawingml/2006/main">
+            <a:r>
+              <a:t/>
+            </a:r>
+          </a:p>
+          <a:p xmlns:a="http://schemas.openxmlformats.org/drawingml/2006/main">
+            <a:r>
+              <a:t/>
+            </a:r>
+          </a:p>
+          <a:p xmlns:a="http://schemas.openxmlformats.org/drawingml/2006/main">
+            <a:r>
+              <a:t>ILLUSTRATIVE IMAGE</a:t>
+            </a:r>
+          </a:p>
+          <a:p xmlns:a="http://schemas.openxmlformats.org/drawingml/2006/main">
+            <a:r>
+              <a:t>AI-generated concept illustration for Today’s learning map. This illustration supports discussion and is not a photograph of the school installation, a software screenshot, or a machine-setting guide. Original source reference images remain on this slide where present.</a:t>
+            </a:r>
+          </a:p>
         </p:txBody>
       </p:sp>
       <p:sp>
@@ -727,6 +767,26 @@
               <a:t>Use the section’s ten questions for individual retrieval and feedback. Do not infer practical competence from online completion.</a:t>
             </a:r>
           </a:p>
+          <a:p xmlns:a="http://schemas.openxmlformats.org/drawingml/2006/main">
+            <a:r>
+              <a:t/>
+            </a:r>
+          </a:p>
+          <a:p xmlns:a="http://schemas.openxmlformats.org/drawingml/2006/main">
+            <a:r>
+              <a:t/>
+            </a:r>
+          </a:p>
+          <a:p xmlns:a="http://schemas.openxmlformats.org/drawingml/2006/main">
+            <a:r>
+              <a:t>ILLUSTRATIVE IMAGE</a:t>
+            </a:r>
+          </a:p>
+          <a:p xmlns:a="http://schemas.openxmlformats.org/drawingml/2006/main">
+            <a:r>
+              <a:t>AI-generated concept illustration for Export, reopen, measure. This illustration supports discussion and is not a photograph of the school installation, a software screenshot, or a machine-setting guide. Original source reference images remain on this slide where present.</a:t>
+            </a:r>
+          </a:p>
         </p:txBody>
       </p:sp>
       <p:sp>
@@ -897,6 +957,26 @@
               <a:t>Use the section’s ten questions for individual retrieval and feedback. Do not infer practical competence from online completion.</a:t>
             </a:r>
           </a:p>
+          <a:p xmlns:a="http://schemas.openxmlformats.org/drawingml/2006/main">
+            <a:r>
+              <a:t/>
+            </a:r>
+          </a:p>
+          <a:p xmlns:a="http://schemas.openxmlformats.org/drawingml/2006/main">
+            <a:r>
+              <a:t/>
+            </a:r>
+          </a:p>
+          <a:p xmlns:a="http://schemas.openxmlformats.org/drawingml/2006/main">
+            <a:r>
+              <a:t>ILLUSTRATIVE IMAGE</a:t>
+            </a:r>
+          </a:p>
+          <a:p xmlns:a="http://schemas.openxmlformats.org/drawingml/2006/main">
+            <a:r>
+              <a:t>AI-generated concept illustration for Plan the toolpath on the waste side. This illustration supports discussion and is not a photograph of the school installation, a software screenshot, or a machine-setting guide. Original source reference images remain on this slide where present.</a:t>
+            </a:r>
+          </a:p>
         </p:txBody>
       </p:sp>
       <p:sp>
@@ -1067,6 +1147,26 @@
               <a:t>Use the section’s ten questions for individual retrieval and feedback. Do not infer practical competence from online completion.</a:t>
             </a:r>
           </a:p>
+          <a:p xmlns:a="http://schemas.openxmlformats.org/drawingml/2006/main">
+            <a:r>
+              <a:t/>
+            </a:r>
+          </a:p>
+          <a:p xmlns:a="http://schemas.openxmlformats.org/drawingml/2006/main">
+            <a:r>
+              <a:t/>
+            </a:r>
+          </a:p>
+          <a:p xmlns:a="http://schemas.openxmlformats.org/drawingml/2006/main">
+            <a:r>
+              <a:t>ILLUSTRATIVE IMAGE</a:t>
+            </a:r>
+          </a:p>
+          <a:p xmlns:a="http://schemas.openxmlformats.org/drawingml/2006/main">
+            <a:r>
+              <a:t>AI-generated concept illustration for Hand over a traceable job. This illustration supports discussion and is not a photograph of the school installation, a software screenshot, or a machine-setting guide. Original source reference images remain on this slide where present.</a:t>
+            </a:r>
+          </a:p>
         </p:txBody>
       </p:sp>
       <p:sp>
@@ -1152,6 +1252,26 @@
               <a:t>What would prevent an older output file being mistaken for the current revision?</a:t>
             </a:r>
           </a:p>
+          <a:p xmlns:a="http://schemas.openxmlformats.org/drawingml/2006/main">
+            <a:r>
+              <a:t/>
+            </a:r>
+          </a:p>
+          <a:p xmlns:a="http://schemas.openxmlformats.org/drawingml/2006/main">
+            <a:r>
+              <a:t/>
+            </a:r>
+          </a:p>
+          <a:p xmlns:a="http://schemas.openxmlformats.org/drawingml/2006/main">
+            <a:r>
+              <a:t>ILLUSTRATIVE IMAGE</a:t>
+            </a:r>
+          </a:p>
+          <a:p xmlns:a="http://schemas.openxmlformats.org/drawingml/2006/main">
+            <a:r>
+              <a:t>AI-generated concept illustration for Pause before looking back. This illustration supports discussion and is not a photograph of the school installation, a software screenshot, or a machine-setting guide. Original source reference images remain on this slide where present.</a:t>
+            </a:r>
+          </a:p>
         </p:txBody>
       </p:sp>
       <p:sp>
@@ -1237,6 +1357,26 @@
               <a:t>Distinguishes completed offline checks from production compatibility and authorisation.</a:t>
             </a:r>
           </a:p>
+          <a:p xmlns:a="http://schemas.openxmlformats.org/drawingml/2006/main">
+            <a:r>
+              <a:t/>
+            </a:r>
+          </a:p>
+          <a:p xmlns:a="http://schemas.openxmlformats.org/drawingml/2006/main">
+            <a:r>
+              <a:t/>
+            </a:r>
+          </a:p>
+          <a:p xmlns:a="http://schemas.openxmlformats.org/drawingml/2006/main">
+            <a:r>
+              <a:t>ILLUSTRATIVE IMAGE</a:t>
+            </a:r>
+          </a:p>
+          <a:p xmlns:a="http://schemas.openxmlformats.org/drawingml/2006/main">
+            <a:r>
+              <a:t>AI-generated concept illustration for Explain your decision with evidence. This illustration supports discussion and is not a photograph of the school installation, a software screenshot, or a machine-setting guide. Original source reference images remain on this slide where present.</a:t>
+            </a:r>
+          </a:p>
         </p:txBody>
       </p:sp>
       <p:sp>
@@ -1305,6 +1445,26 @@
           <a:p xmlns:a="http://schemas.openxmlformats.org/drawingml/2006/main">
             <a:r>
               <a:t>Open modules/module-03.html#module-03-review. Review completion and feedback rather than treating checked answers as a competence result. Keep original CAD files separately. Students should state their own contribution and identify teacher-controlled production honestly.</a:t>
+            </a:r>
+          </a:p>
+          <a:p xmlns:a="http://schemas.openxmlformats.org/drawingml/2006/main">
+            <a:r>
+              <a:t/>
+            </a:r>
+          </a:p>
+          <a:p xmlns:a="http://schemas.openxmlformats.org/drawingml/2006/main">
+            <a:r>
+              <a:t/>
+            </a:r>
+          </a:p>
+          <a:p xmlns:a="http://schemas.openxmlformats.org/drawingml/2006/main">
+            <a:r>
+              <a:t>ILLUSTRATIVE IMAGE</a:t>
+            </a:r>
+          </a:p>
+          <a:p xmlns:a="http://schemas.openxmlformats.org/drawingml/2006/main">
+            <a:r>
+              <a:t>AI-generated concept illustration for Leave with something useful. This illustration supports discussion and is not a photograph of the school installation, a software screenshot, or a machine-setting guide. Original source reference images remain on this slide where present.</a:t>
             </a:r>
           </a:p>
         </p:txBody>
@@ -1372,7 +1532,7 @@
   </p:cSld>
   <p:clrMap bg1="lt1" tx1="dk1" bg2="lt2" tx2="dk2" accent1="accent1" accent2="accent2" accent3="accent3" accent4="accent4" accent5="accent5" accent6="accent6" hlink="hlink" folHlink="folHlink"/>
   <p:sldLayoutIdLst>
-    <p:sldLayoutId xmlns:r="http://schemas.openxmlformats.org/officeDocument/2006/relationships" id="2147483649" r:id="R6c15e843b1754bf0"/>
+    <p:sldLayoutId xmlns:r="http://schemas.openxmlformats.org/officeDocument/2006/relationships" id="2147483649" r:id="R76a2bb596d234c75"/>
   </p:sldLayoutIdLst>
   <p:txStyles>
     <p:titleStyle>
@@ -1982,6 +2142,7 @@
           <a:lstStyle xmlns:a="http://schemas.openxmlformats.org/drawingml/2006/main"/>
           <a:p xmlns:a="http://schemas.openxmlformats.org/drawingml/2006/main">
             <a:pPr>
+              <a:buNone/>
               <a:defRPr sz="1200" b="1">
                 <a:solidFill>
                   <a:srgbClr val="2F6079"/>
@@ -2039,6 +2200,7 @@
           <a:lstStyle xmlns:a="http://schemas.openxmlformats.org/drawingml/2006/main"/>
           <a:p xmlns:a="http://schemas.openxmlformats.org/drawingml/2006/main">
             <a:pPr>
+              <a:buNone/>
               <a:defRPr sz="1050" b="0">
                 <a:solidFill>
                   <a:srgbClr val="526571"/>
@@ -2096,6 +2258,7 @@
           <a:lstStyle xmlns:a="http://schemas.openxmlformats.org/drawingml/2006/main"/>
           <a:p xmlns:a="http://schemas.openxmlformats.org/drawingml/2006/main">
             <a:pPr>
+              <a:buNone/>
               <a:defRPr sz="1125" b="1">
                 <a:solidFill>
                   <a:srgbClr val="2F6079"/>
@@ -2153,6 +2316,7 @@
           <a:lstStyle xmlns:a="http://schemas.openxmlformats.org/drawingml/2006/main"/>
           <a:p xmlns:a="http://schemas.openxmlformats.org/drawingml/2006/main">
             <a:pPr>
+              <a:buNone/>
               <a:defRPr sz="3525" b="1">
                 <a:solidFill>
                   <a:srgbClr val="18303F"/>
@@ -2210,6 +2374,7 @@
           <a:lstStyle xmlns:a="http://schemas.openxmlformats.org/drawingml/2006/main"/>
           <a:p xmlns:a="http://schemas.openxmlformats.org/drawingml/2006/main">
             <a:pPr>
+              <a:buNone/>
               <a:defRPr sz="2025" b="0">
                 <a:solidFill>
                   <a:srgbClr val="18303F"/>
@@ -2267,6 +2432,7 @@
           <a:lstStyle xmlns:a="http://schemas.openxmlformats.org/drawingml/2006/main"/>
           <a:p xmlns:a="http://schemas.openxmlformats.org/drawingml/2006/main">
             <a:pPr>
+              <a:buNone/>
               <a:defRPr sz="1725" b="1">
                 <a:solidFill>
                   <a:srgbClr val="2F6079"/>
@@ -2307,7 +2473,7 @@
         <p:spPr>
           <a:xfrm xmlns:a="http://schemas.openxmlformats.org/drawingml/2006/main">
             <a:off x="6334125" y="1009650"/>
-            <a:ext cx="5314950" cy="4933950"/>
+            <a:ext cx="5314950" cy="4400550"/>
           </a:xfrm>
           <a:prstGeom xmlns:a="http://schemas.openxmlformats.org/drawingml/2006/main" prst="rect">
             <a:avLst/>
@@ -2322,20 +2488,20 @@
       </p:sp>
       <p:pic>
         <p:nvPicPr>
-          <p:cNvPr id="19" name=""/>
+          <p:cNvPr id="21" name=""/>
           <p:cNvPicPr>
             <a:picLocks xmlns:a="http://schemas.openxmlformats.org/drawingml/2006/main" noChangeAspect="1"/>
           </p:cNvPicPr>
           <p:nvPr/>
         </p:nvPicPr>
         <p:blipFill>
-          <a:blip xmlns:r="http://schemas.openxmlformats.org/officeDocument/2006/relationships" xmlns:a="http://schemas.openxmlformats.org/drawingml/2006/main" r:embed="Raab4ab4eedf24690"/>
+          <a:blip xmlns:r="http://schemas.openxmlformats.org/officeDocument/2006/relationships" xmlns:a="http://schemas.openxmlformats.org/drawingml/2006/main" r:embed="R9aa1da414afb4705"/>
           <a:stretch xmlns:a="http://schemas.openxmlformats.org/drawingml/2006/main"/>
         </p:blipFill>
         <p:spPr>
           <a:xfrm xmlns:a="http://schemas.openxmlformats.org/drawingml/2006/main">
-            <a:off x="6524625" y="1345549"/>
-            <a:ext cx="4933950" cy="3500153"/>
+            <a:off x="6524625" y="1341438"/>
+            <a:ext cx="4933950" cy="3289300"/>
           </a:xfrm>
           <a:prstGeom xmlns:a="http://schemas.openxmlformats.org/drawingml/2006/main" prst="rect">
             <a:avLst/>
@@ -2358,8 +2524,8 @@
         </p:nvSpPr>
         <p:spPr>
           <a:xfrm xmlns:a="http://schemas.openxmlformats.org/drawingml/2006/main">
-            <a:off x="6543675" y="5238750"/>
-            <a:ext cx="4857750" cy="523875"/>
+            <a:off x="6524625" y="4895850"/>
+            <a:ext cx="4933950" cy="381000"/>
           </a:xfrm>
           <a:prstGeom xmlns:a="http://schemas.openxmlformats.org/drawingml/2006/main" prst="rect">
             <a:avLst/>
@@ -2376,9 +2542,10 @@
           <a:lstStyle xmlns:a="http://schemas.openxmlformats.org/drawingml/2006/main"/>
           <a:p xmlns:a="http://schemas.openxmlformats.org/drawingml/2006/main">
             <a:pPr>
+              <a:buNone/>
               <a:defRPr sz="1275" b="0">
                 <a:solidFill>
-                  <a:srgbClr val="526571"/>
+                  <a:srgbClr val="18303F"/>
                 </a:solidFill>
                 <a:latin typeface="Arial"/>
                 <a:ea typeface="Arial"/>
@@ -2388,13 +2555,13 @@
             <a:r>
               <a:rPr sz="1275" b="0">
                 <a:solidFill>
-                  <a:srgbClr val="526571"/>
-                </a:solidFill>
-                <a:latin typeface="Arial"/>
-                <a:ea typeface="Arial"/>
-                <a:cs typeface="Arial"/>
-              </a:rPr>
-              <a:t>Source reference / teaching example</a:t>
+                  <a:srgbClr val="18303F"/>
+                </a:solidFill>
+                <a:latin typeface="Arial"/>
+                <a:ea typeface="Arial"/>
+                <a:cs typeface="Arial"/>
+              </a:rPr>
+              <a:t>AI-generated concept image</a:t>
             </a:r>
           </a:p>
         </p:txBody>
@@ -2492,6 +2659,7 @@
           <a:lstStyle xmlns:a="http://schemas.openxmlformats.org/drawingml/2006/main"/>
           <a:p xmlns:a="http://schemas.openxmlformats.org/drawingml/2006/main">
             <a:pPr>
+              <a:buNone/>
               <a:defRPr sz="1200" b="1">
                 <a:solidFill>
                   <a:srgbClr val="2F6079"/>
@@ -2549,6 +2717,7 @@
           <a:lstStyle xmlns:a="http://schemas.openxmlformats.org/drawingml/2006/main"/>
           <a:p xmlns:a="http://schemas.openxmlformats.org/drawingml/2006/main">
             <a:pPr>
+              <a:buNone/>
               <a:defRPr sz="1050" b="0">
                 <a:solidFill>
                   <a:srgbClr val="526571"/>
@@ -2606,6 +2775,7 @@
           <a:lstStyle xmlns:a="http://schemas.openxmlformats.org/drawingml/2006/main"/>
           <a:p xmlns:a="http://schemas.openxmlformats.org/drawingml/2006/main">
             <a:pPr>
+              <a:buNone/>
               <a:defRPr sz="1125" b="1">
                 <a:solidFill>
                   <a:srgbClr val="2F6079"/>
@@ -2663,6 +2833,7 @@
           <a:lstStyle xmlns:a="http://schemas.openxmlformats.org/drawingml/2006/main"/>
           <a:p xmlns:a="http://schemas.openxmlformats.org/drawingml/2006/main">
             <a:pPr>
+              <a:buNone/>
               <a:defRPr sz="3225" b="1">
                 <a:solidFill>
                   <a:srgbClr val="18303F"/>
@@ -2720,6 +2891,7 @@
           <a:lstStyle xmlns:a="http://schemas.openxmlformats.org/drawingml/2006/main"/>
           <a:p xmlns:a="http://schemas.openxmlformats.org/drawingml/2006/main">
             <a:pPr>
+              <a:buNone/>
               <a:defRPr sz="3450" b="1">
                 <a:solidFill>
                   <a:srgbClr val="2F6079"/>
@@ -2760,7 +2932,7 @@
         <p:spPr>
           <a:xfrm xmlns:a="http://schemas.openxmlformats.org/drawingml/2006/main">
             <a:off x="1562100" y="2143125"/>
-            <a:ext cx="9620250" cy="742950"/>
+            <a:ext cx="6096000" cy="952500"/>
           </a:xfrm>
           <a:prstGeom xmlns:a="http://schemas.openxmlformats.org/drawingml/2006/main" prst="rect">
             <a:avLst/>
@@ -2777,7 +2949,8 @@
           <a:lstStyle xmlns:a="http://schemas.openxmlformats.org/drawingml/2006/main"/>
           <a:p xmlns:a="http://schemas.openxmlformats.org/drawingml/2006/main">
             <a:pPr>
-              <a:defRPr sz="2175" b="1">
+              <a:buNone/>
+              <a:defRPr sz="2100" b="1">
                 <a:solidFill>
                   <a:srgbClr val="18303F"/>
                 </a:solidFill>
@@ -2787,7 +2960,7 @@
               </a:defRPr>
             </a:pPr>
             <a:r>
-              <a:rPr sz="2175" b="1">
+              <a:rPr sz="2100" b="1">
                 <a:solidFill>
                   <a:srgbClr val="18303F"/>
                 </a:solidFill>
@@ -2834,6 +3007,7 @@
           <a:lstStyle xmlns:a="http://schemas.openxmlformats.org/drawingml/2006/main"/>
           <a:p xmlns:a="http://schemas.openxmlformats.org/drawingml/2006/main">
             <a:pPr>
+              <a:buNone/>
               <a:defRPr sz="3450" b="1">
                 <a:solidFill>
                   <a:srgbClr val="2F6079"/>
@@ -2874,7 +3048,7 @@
         <p:spPr>
           <a:xfrm xmlns:a="http://schemas.openxmlformats.org/drawingml/2006/main">
             <a:off x="1562100" y="3286125"/>
-            <a:ext cx="9620250" cy="742950"/>
+            <a:ext cx="6096000" cy="952500"/>
           </a:xfrm>
           <a:prstGeom xmlns:a="http://schemas.openxmlformats.org/drawingml/2006/main" prst="rect">
             <a:avLst/>
@@ -2891,7 +3065,8 @@
           <a:lstStyle xmlns:a="http://schemas.openxmlformats.org/drawingml/2006/main"/>
           <a:p xmlns:a="http://schemas.openxmlformats.org/drawingml/2006/main">
             <a:pPr>
-              <a:defRPr sz="2175" b="1">
+              <a:buNone/>
+              <a:defRPr sz="2100" b="1">
                 <a:solidFill>
                   <a:srgbClr val="18303F"/>
                 </a:solidFill>
@@ -2901,7 +3076,7 @@
               </a:defRPr>
             </a:pPr>
             <a:r>
-              <a:rPr sz="2175" b="1">
+              <a:rPr sz="2100" b="1">
                 <a:solidFill>
                   <a:srgbClr val="18303F"/>
                 </a:solidFill>
@@ -2948,6 +3123,7 @@
           <a:lstStyle xmlns:a="http://schemas.openxmlformats.org/drawingml/2006/main"/>
           <a:p xmlns:a="http://schemas.openxmlformats.org/drawingml/2006/main">
             <a:pPr>
+              <a:buNone/>
               <a:defRPr sz="3450" b="1">
                 <a:solidFill>
                   <a:srgbClr val="2F6079"/>
@@ -2988,7 +3164,7 @@
         <p:spPr>
           <a:xfrm xmlns:a="http://schemas.openxmlformats.org/drawingml/2006/main">
             <a:off x="1562100" y="4429125"/>
-            <a:ext cx="9620250" cy="742950"/>
+            <a:ext cx="6096000" cy="952500"/>
           </a:xfrm>
           <a:prstGeom xmlns:a="http://schemas.openxmlformats.org/drawingml/2006/main" prst="rect">
             <a:avLst/>
@@ -3005,7 +3181,8 @@
           <a:lstStyle xmlns:a="http://schemas.openxmlformats.org/drawingml/2006/main"/>
           <a:p xmlns:a="http://schemas.openxmlformats.org/drawingml/2006/main">
             <a:pPr>
-              <a:defRPr sz="2175" b="1">
+              <a:buNone/>
+              <a:defRPr sz="2100" b="1">
                 <a:solidFill>
                   <a:srgbClr val="18303F"/>
                 </a:solidFill>
@@ -3015,7 +3192,7 @@
               </a:defRPr>
             </a:pPr>
             <a:r>
-              <a:rPr sz="2175" b="1">
+              <a:rPr sz="2100" b="1">
                 <a:solidFill>
                   <a:srgbClr val="18303F"/>
                 </a:solidFill>
@@ -3062,6 +3239,7 @@
           <a:lstStyle xmlns:a="http://schemas.openxmlformats.org/drawingml/2006/main"/>
           <a:p xmlns:a="http://schemas.openxmlformats.org/drawingml/2006/main">
             <a:pPr>
+              <a:buNone/>
               <a:defRPr sz="1725" b="0">
                 <a:solidFill>
                   <a:srgbClr val="2F6079"/>
@@ -3081,6 +3259,85 @@
                 <a:cs typeface="Arial"/>
               </a:rPr>
               <a:t>Before we begin: which step in the workflow needs the strongest check?</a:t>
+            </a:r>
+          </a:p>
+        </p:txBody>
+      </p:sp>
+      <p:pic>
+        <p:nvPicPr>
+          <p:cNvPr id="28" name=""/>
+          <p:cNvPicPr>
+            <a:picLocks xmlns:a="http://schemas.openxmlformats.org/drawingml/2006/main" noChangeAspect="1"/>
+          </p:cNvPicPr>
+          <p:nvPr/>
+        </p:nvPicPr>
+        <p:blipFill>
+          <a:blip xmlns:r="http://schemas.openxmlformats.org/officeDocument/2006/relationships" xmlns:a="http://schemas.openxmlformats.org/drawingml/2006/main" r:embed="Rd23512d254004a80"/>
+          <a:stretch xmlns:a="http://schemas.openxmlformats.org/drawingml/2006/main"/>
+        </p:blipFill>
+        <p:spPr>
+          <a:xfrm xmlns:a="http://schemas.openxmlformats.org/drawingml/2006/main">
+            <a:off x="7858125" y="2444750"/>
+            <a:ext cx="3810000" cy="2540000"/>
+          </a:xfrm>
+          <a:prstGeom xmlns:a="http://schemas.openxmlformats.org/drawingml/2006/main" prst="rect">
+            <a:avLst/>
+          </a:prstGeom>
+        </p:spPr>
+      </p:pic>
+      <p:sp>
+        <p:nvSpPr>
+          <p:cNvPr id="15" name="">
+            <a:extLst xmlns:a="http://schemas.openxmlformats.org/drawingml/2006/main">
+              <a:ext uri="{FF2B5EF4-FFF2-40B4-BE49-F238E27FC236}">
+                <a16:creationId xmlns:a16="http://schemas.microsoft.com/office/drawing/2014/main" id="{3EFD20E1-2D98-4BDC-AAD2-A59522D34674}"/>
+              </a:ext>
+            </a:extLst>
+          </p:cNvPr>
+          <p:cNvSpPr>
+            <a:spLocks xmlns:a="http://schemas.openxmlformats.org/drawingml/2006/main" noGrp="1"/>
+          </p:cNvSpPr>
+          <p:nvPr/>
+        </p:nvSpPr>
+        <p:spPr>
+          <a:xfrm xmlns:a="http://schemas.openxmlformats.org/drawingml/2006/main">
+            <a:off x="7858125" y="5562600"/>
+            <a:ext cx="3810000" cy="171450"/>
+          </a:xfrm>
+          <a:prstGeom xmlns:a="http://schemas.openxmlformats.org/drawingml/2006/main" prst="rect">
+            <a:avLst/>
+          </a:prstGeom>
+          <a:noFill xmlns:a="http://schemas.openxmlformats.org/drawingml/2006/main"/>
+          <a:ln xmlns:a="http://schemas.openxmlformats.org/drawingml/2006/main" w="0">
+            <a:noFill/>
+          </a:ln>
+        </p:spPr>
+        <p:txBody>
+          <a:bodyPr xmlns:a="http://schemas.openxmlformats.org/drawingml/2006/main">
+            <a:noAutofit/>
+          </a:bodyPr>
+          <a:lstStyle xmlns:a="http://schemas.openxmlformats.org/drawingml/2006/main"/>
+          <a:p xmlns:a="http://schemas.openxmlformats.org/drawingml/2006/main">
+            <a:pPr>
+              <a:defRPr sz="900">
+                <a:solidFill>
+                  <a:srgbClr val="526571"/>
+                </a:solidFill>
+                <a:latin typeface="Arial"/>
+                <a:ea typeface="Arial"/>
+                <a:cs typeface="Arial"/>
+              </a:defRPr>
+            </a:pPr>
+            <a:r>
+              <a:rPr sz="900">
+                <a:solidFill>
+                  <a:srgbClr val="526571"/>
+                </a:solidFill>
+                <a:latin typeface="Arial"/>
+                <a:ea typeface="Arial"/>
+                <a:cs typeface="Arial"/>
+              </a:rPr>
+              <a:t>AI-generated concept image</a:t>
             </a:r>
           </a:p>
         </p:txBody>
@@ -3178,6 +3435,7 @@
           <a:lstStyle xmlns:a="http://schemas.openxmlformats.org/drawingml/2006/main"/>
           <a:p xmlns:a="http://schemas.openxmlformats.org/drawingml/2006/main">
             <a:pPr>
+              <a:buNone/>
               <a:defRPr sz="1200" b="1">
                 <a:solidFill>
                   <a:srgbClr val="2F6079"/>
@@ -3235,6 +3493,7 @@
           <a:lstStyle xmlns:a="http://schemas.openxmlformats.org/drawingml/2006/main"/>
           <a:p xmlns:a="http://schemas.openxmlformats.org/drawingml/2006/main">
             <a:pPr>
+              <a:buNone/>
               <a:defRPr sz="1050" b="0">
                 <a:solidFill>
                   <a:srgbClr val="526571"/>
@@ -3292,6 +3551,7 @@
           <a:lstStyle xmlns:a="http://schemas.openxmlformats.org/drawingml/2006/main"/>
           <a:p xmlns:a="http://schemas.openxmlformats.org/drawingml/2006/main">
             <a:pPr>
+              <a:buNone/>
               <a:defRPr sz="1125" b="1">
                 <a:solidFill>
                   <a:srgbClr val="2F6079"/>
@@ -3349,6 +3609,7 @@
           <a:lstStyle xmlns:a="http://schemas.openxmlformats.org/drawingml/2006/main"/>
           <a:p xmlns:a="http://schemas.openxmlformats.org/drawingml/2006/main">
             <a:pPr>
+              <a:buNone/>
               <a:defRPr sz="2850" b="1">
                 <a:solidFill>
                   <a:srgbClr val="18303F"/>
@@ -3406,6 +3667,7 @@
           <a:lstStyle xmlns:a="http://schemas.openxmlformats.org/drawingml/2006/main"/>
           <a:p xmlns:a="http://schemas.openxmlformats.org/drawingml/2006/main">
             <a:pPr>
+              <a:buNone/>
               <a:defRPr sz="1875" b="0">
                 <a:solidFill>
                   <a:srgbClr val="18303F"/>
@@ -3434,6 +3696,7 @@
           </a:p>
           <a:p xmlns:a="http://schemas.openxmlformats.org/drawingml/2006/main">
             <a:pPr>
+              <a:buNone/>
               <a:defRPr sz="1875" b="0">
                 <a:solidFill>
                   <a:srgbClr val="18303F"/>
@@ -3473,8 +3736,8 @@
         </p:nvSpPr>
         <p:spPr>
           <a:xfrm xmlns:a="http://schemas.openxmlformats.org/drawingml/2006/main">
-            <a:off x="5810250" y="1962150"/>
-            <a:ext cx="5857875" cy="3238500"/>
+            <a:off x="5810250" y="1714500"/>
+            <a:ext cx="5857875" cy="2876550"/>
           </a:xfrm>
           <a:prstGeom xmlns:a="http://schemas.openxmlformats.org/drawingml/2006/main" prst="rect">
             <a:avLst/>
@@ -3489,20 +3752,21 @@
       </p:sp>
       <p:pic>
         <p:nvPicPr>
-          <p:cNvPr id="18" name=""/>
+          <p:cNvPr id="22" name=""/>
           <p:cNvPicPr>
             <a:picLocks xmlns:a="http://schemas.openxmlformats.org/drawingml/2006/main" noChangeAspect="1"/>
           </p:cNvPicPr>
           <p:nvPr/>
         </p:nvPicPr>
         <p:blipFill>
-          <a:blip xmlns:r="http://schemas.openxmlformats.org/officeDocument/2006/relationships" xmlns:a="http://schemas.openxmlformats.org/drawingml/2006/main" r:embed="R3a2ee5fdffe642f6"/>
+          <a:blip xmlns:r="http://schemas.openxmlformats.org/officeDocument/2006/relationships" xmlns:a="http://schemas.openxmlformats.org/drawingml/2006/main" r:embed="R64e3df0cfe704684"/>
+          <a:srcRect xmlns:a="http://schemas.openxmlformats.org/drawingml/2006/main" l="0" t="0" r="0" b="0"/>
           <a:stretch xmlns:a="http://schemas.openxmlformats.org/drawingml/2006/main"/>
         </p:blipFill>
         <p:spPr>
           <a:xfrm xmlns:a="http://schemas.openxmlformats.org/drawingml/2006/main">
-            <a:off x="6564045" y="2038350"/>
-            <a:ext cx="4350286" cy="3086100"/>
+            <a:off x="6819166" y="1790700"/>
+            <a:ext cx="3840043" cy="2724150"/>
           </a:xfrm>
           <a:prstGeom xmlns:a="http://schemas.openxmlformats.org/drawingml/2006/main" prst="rect">
             <a:avLst/>
@@ -3525,8 +3789,8 @@
         </p:nvSpPr>
         <p:spPr>
           <a:xfrm xmlns:a="http://schemas.openxmlformats.org/drawingml/2006/main">
-            <a:off x="5838825" y="5324475"/>
-            <a:ext cx="5810250" cy="600075"/>
+            <a:off x="8096250" y="4819650"/>
+            <a:ext cx="3571875" cy="1257300"/>
           </a:xfrm>
           <a:prstGeom xmlns:a="http://schemas.openxmlformats.org/drawingml/2006/main" prst="rect">
             <a:avLst/>
@@ -3543,9 +3807,10 @@
           <a:lstStyle xmlns:a="http://schemas.openxmlformats.org/drawingml/2006/main"/>
           <a:p xmlns:a="http://schemas.openxmlformats.org/drawingml/2006/main">
             <a:pPr>
+              <a:buNone/>
               <a:defRPr sz="1125" b="0">
                 <a:solidFill>
-                  <a:srgbClr val="526571"/>
+                  <a:srgbClr val="18303F"/>
                 </a:solidFill>
                 <a:latin typeface="Arial"/>
                 <a:ea typeface="Arial"/>
@@ -3555,7 +3820,7 @@
             <a:r>
               <a:rPr sz="1125" b="0">
                 <a:solidFill>
-                  <a:srgbClr val="526571"/>
+                  <a:srgbClr val="18303F"/>
                 </a:solidFill>
                 <a:latin typeface="Arial"/>
                 <a:ea typeface="Arial"/>
@@ -3600,6 +3865,7 @@
           <a:lstStyle xmlns:a="http://schemas.openxmlformats.org/drawingml/2006/main"/>
           <a:p xmlns:a="http://schemas.openxmlformats.org/drawingml/2006/main">
             <a:pPr>
+              <a:buNone/>
               <a:defRPr sz="1725" b="1">
                 <a:solidFill>
                   <a:srgbClr val="2F6079"/>
@@ -3619,6 +3885,85 @@
                 <a:cs typeface="Arial"/>
               </a:rPr>
               <a:t>Which check distinguishes a successful opening from a correct import?</a:t>
+            </a:r>
+          </a:p>
+        </p:txBody>
+      </p:sp>
+      <p:pic>
+        <p:nvPicPr>
+          <p:cNvPr id="25" name=""/>
+          <p:cNvPicPr>
+            <a:picLocks xmlns:a="http://schemas.openxmlformats.org/drawingml/2006/main" noChangeAspect="1"/>
+          </p:cNvPicPr>
+          <p:nvPr/>
+        </p:nvPicPr>
+        <p:blipFill>
+          <a:blip xmlns:r="http://schemas.openxmlformats.org/officeDocument/2006/relationships" xmlns:a="http://schemas.openxmlformats.org/drawingml/2006/main" r:embed="R10ba78d282e44e6a"/>
+          <a:stretch xmlns:a="http://schemas.openxmlformats.org/drawingml/2006/main"/>
+        </p:blipFill>
+        <p:spPr>
+          <a:xfrm xmlns:a="http://schemas.openxmlformats.org/drawingml/2006/main">
+            <a:off x="5826919" y="4762500"/>
+            <a:ext cx="2014538" cy="1343025"/>
+          </a:xfrm>
+          <a:prstGeom xmlns:a="http://schemas.openxmlformats.org/drawingml/2006/main" prst="rect">
+            <a:avLst/>
+          </a:prstGeom>
+        </p:spPr>
+      </p:pic>
+      <p:sp>
+        <p:nvSpPr>
+          <p:cNvPr id="14" name="">
+            <a:extLst xmlns:a="http://schemas.openxmlformats.org/drawingml/2006/main">
+              <a:ext uri="{FF2B5EF4-FFF2-40B4-BE49-F238E27FC236}">
+                <a16:creationId xmlns:a16="http://schemas.microsoft.com/office/drawing/2014/main" id="{1B297F7B-6ADB-4CF6-B1A5-391E71AFA109}"/>
+              </a:ext>
+            </a:extLst>
+          </p:cNvPr>
+          <p:cNvSpPr>
+            <a:spLocks xmlns:a="http://schemas.openxmlformats.org/drawingml/2006/main" noGrp="1"/>
+          </p:cNvSpPr>
+          <p:nvPr/>
+        </p:nvSpPr>
+        <p:spPr>
+          <a:xfrm xmlns:a="http://schemas.openxmlformats.org/drawingml/2006/main">
+            <a:off x="5810250" y="6115050"/>
+            <a:ext cx="2286000" cy="171450"/>
+          </a:xfrm>
+          <a:prstGeom xmlns:a="http://schemas.openxmlformats.org/drawingml/2006/main" prst="rect">
+            <a:avLst/>
+          </a:prstGeom>
+          <a:noFill xmlns:a="http://schemas.openxmlformats.org/drawingml/2006/main"/>
+          <a:ln xmlns:a="http://schemas.openxmlformats.org/drawingml/2006/main" w="0">
+            <a:noFill/>
+          </a:ln>
+        </p:spPr>
+        <p:txBody>
+          <a:bodyPr xmlns:a="http://schemas.openxmlformats.org/drawingml/2006/main">
+            <a:noAutofit/>
+          </a:bodyPr>
+          <a:lstStyle xmlns:a="http://schemas.openxmlformats.org/drawingml/2006/main"/>
+          <a:p xmlns:a="http://schemas.openxmlformats.org/drawingml/2006/main">
+            <a:pPr>
+              <a:defRPr sz="900">
+                <a:solidFill>
+                  <a:srgbClr val="526571"/>
+                </a:solidFill>
+                <a:latin typeface="Arial"/>
+                <a:ea typeface="Arial"/>
+                <a:cs typeface="Arial"/>
+              </a:defRPr>
+            </a:pPr>
+            <a:r>
+              <a:rPr sz="900">
+                <a:solidFill>
+                  <a:srgbClr val="526571"/>
+                </a:solidFill>
+                <a:latin typeface="Arial"/>
+                <a:ea typeface="Arial"/>
+                <a:cs typeface="Arial"/>
+              </a:rPr>
+              <a:t>AI-generated concept image</a:t>
             </a:r>
           </a:p>
         </p:txBody>
@@ -3716,6 +4061,7 @@
           <a:lstStyle xmlns:a="http://schemas.openxmlformats.org/drawingml/2006/main"/>
           <a:p xmlns:a="http://schemas.openxmlformats.org/drawingml/2006/main">
             <a:pPr>
+              <a:buNone/>
               <a:defRPr sz="1200" b="1">
                 <a:solidFill>
                   <a:srgbClr val="2F6079"/>
@@ -3773,6 +4119,7 @@
           <a:lstStyle xmlns:a="http://schemas.openxmlformats.org/drawingml/2006/main"/>
           <a:p xmlns:a="http://schemas.openxmlformats.org/drawingml/2006/main">
             <a:pPr>
+              <a:buNone/>
               <a:defRPr sz="1050" b="0">
                 <a:solidFill>
                   <a:srgbClr val="526571"/>
@@ -3830,6 +4177,7 @@
           <a:lstStyle xmlns:a="http://schemas.openxmlformats.org/drawingml/2006/main"/>
           <a:p xmlns:a="http://schemas.openxmlformats.org/drawingml/2006/main">
             <a:pPr>
+              <a:buNone/>
               <a:defRPr sz="1125" b="1">
                 <a:solidFill>
                   <a:srgbClr val="2F6079"/>
@@ -3887,6 +4235,7 @@
           <a:lstStyle xmlns:a="http://schemas.openxmlformats.org/drawingml/2006/main"/>
           <a:p xmlns:a="http://schemas.openxmlformats.org/drawingml/2006/main">
             <a:pPr>
+              <a:buNone/>
               <a:defRPr sz="2850" b="1">
                 <a:solidFill>
                   <a:srgbClr val="18303F"/>
@@ -3944,6 +4293,7 @@
           <a:lstStyle xmlns:a="http://schemas.openxmlformats.org/drawingml/2006/main"/>
           <a:p xmlns:a="http://schemas.openxmlformats.org/drawingml/2006/main">
             <a:pPr>
+              <a:buNone/>
               <a:defRPr sz="1875" b="0">
                 <a:solidFill>
                   <a:srgbClr val="18303F"/>
@@ -3972,6 +4322,7 @@
           </a:p>
           <a:p xmlns:a="http://schemas.openxmlformats.org/drawingml/2006/main">
             <a:pPr>
+              <a:buNone/>
               <a:defRPr sz="1875" b="0">
                 <a:solidFill>
                   <a:srgbClr val="18303F"/>
@@ -4011,8 +4362,8 @@
         </p:nvSpPr>
         <p:spPr>
           <a:xfrm xmlns:a="http://schemas.openxmlformats.org/drawingml/2006/main">
-            <a:off x="5810250" y="1962150"/>
-            <a:ext cx="5857875" cy="3238500"/>
+            <a:off x="5810250" y="1714500"/>
+            <a:ext cx="5857875" cy="2876550"/>
           </a:xfrm>
           <a:prstGeom xmlns:a="http://schemas.openxmlformats.org/drawingml/2006/main" prst="rect">
             <a:avLst/>
@@ -4027,20 +4378,21 @@
       </p:sp>
       <p:pic>
         <p:nvPicPr>
-          <p:cNvPr id="18" name=""/>
+          <p:cNvPr id="22" name=""/>
           <p:cNvPicPr>
             <a:picLocks xmlns:a="http://schemas.openxmlformats.org/drawingml/2006/main" noChangeAspect="1"/>
           </p:cNvPicPr>
           <p:nvPr/>
         </p:nvPicPr>
         <p:blipFill>
-          <a:blip xmlns:r="http://schemas.openxmlformats.org/officeDocument/2006/relationships" xmlns:a="http://schemas.openxmlformats.org/drawingml/2006/main" r:embed="R7ea2c29b69214892"/>
+          <a:blip xmlns:r="http://schemas.openxmlformats.org/officeDocument/2006/relationships" xmlns:a="http://schemas.openxmlformats.org/drawingml/2006/main" r:embed="R246cd7b7086a4430"/>
+          <a:srcRect xmlns:a="http://schemas.openxmlformats.org/drawingml/2006/main" l="0" t="0" r="0" b="0"/>
           <a:stretch xmlns:a="http://schemas.openxmlformats.org/drawingml/2006/main"/>
         </p:blipFill>
         <p:spPr>
           <a:xfrm xmlns:a="http://schemas.openxmlformats.org/drawingml/2006/main">
-            <a:off x="6104712" y="2038350"/>
-            <a:ext cx="5268951" cy="3086100"/>
+            <a:off x="6413697" y="1790700"/>
+            <a:ext cx="4650982" cy="2724150"/>
           </a:xfrm>
           <a:prstGeom xmlns:a="http://schemas.openxmlformats.org/drawingml/2006/main" prst="rect">
             <a:avLst/>
@@ -4063,8 +4415,8 @@
         </p:nvSpPr>
         <p:spPr>
           <a:xfrm xmlns:a="http://schemas.openxmlformats.org/drawingml/2006/main">
-            <a:off x="5838825" y="5324475"/>
-            <a:ext cx="5810250" cy="600075"/>
+            <a:off x="8096250" y="4819650"/>
+            <a:ext cx="3571875" cy="1257300"/>
           </a:xfrm>
           <a:prstGeom xmlns:a="http://schemas.openxmlformats.org/drawingml/2006/main" prst="rect">
             <a:avLst/>
@@ -4081,9 +4433,10 @@
           <a:lstStyle xmlns:a="http://schemas.openxmlformats.org/drawingml/2006/main"/>
           <a:p xmlns:a="http://schemas.openxmlformats.org/drawingml/2006/main">
             <a:pPr>
+              <a:buNone/>
               <a:defRPr sz="1125" b="0">
                 <a:solidFill>
-                  <a:srgbClr val="526571"/>
+                  <a:srgbClr val="18303F"/>
                 </a:solidFill>
                 <a:latin typeface="Arial"/>
                 <a:ea typeface="Arial"/>
@@ -4093,7 +4446,7 @@
             <a:r>
               <a:rPr sz="1125" b="0">
                 <a:solidFill>
-                  <a:srgbClr val="526571"/>
+                  <a:srgbClr val="18303F"/>
                 </a:solidFill>
                 <a:latin typeface="Arial"/>
                 <a:ea typeface="Arial"/>
@@ -4138,6 +4491,7 @@
           <a:lstStyle xmlns:a="http://schemas.openxmlformats.org/drawingml/2006/main"/>
           <a:p xmlns:a="http://schemas.openxmlformats.org/drawingml/2006/main">
             <a:pPr>
+              <a:buNone/>
               <a:defRPr sz="1725" b="1">
                 <a:solidFill>
                   <a:srgbClr val="2F6079"/>
@@ -4157,6 +4511,85 @@
                 <a:cs typeface="Arial"/>
               </a:rPr>
               <a:t>Why is the waste side different for the hole and the outer edge?</a:t>
+            </a:r>
+          </a:p>
+        </p:txBody>
+      </p:sp>
+      <p:pic>
+        <p:nvPicPr>
+          <p:cNvPr id="25" name=""/>
+          <p:cNvPicPr>
+            <a:picLocks xmlns:a="http://schemas.openxmlformats.org/drawingml/2006/main" noChangeAspect="1"/>
+          </p:cNvPicPr>
+          <p:nvPr/>
+        </p:nvPicPr>
+        <p:blipFill>
+          <a:blip xmlns:r="http://schemas.openxmlformats.org/officeDocument/2006/relationships" xmlns:a="http://schemas.openxmlformats.org/drawingml/2006/main" r:embed="R0af7b450497e45c0"/>
+          <a:stretch xmlns:a="http://schemas.openxmlformats.org/drawingml/2006/main"/>
+        </p:blipFill>
+        <p:spPr>
+          <a:xfrm xmlns:a="http://schemas.openxmlformats.org/drawingml/2006/main">
+            <a:off x="5826919" y="4762500"/>
+            <a:ext cx="2014538" cy="1343025"/>
+          </a:xfrm>
+          <a:prstGeom xmlns:a="http://schemas.openxmlformats.org/drawingml/2006/main" prst="rect">
+            <a:avLst/>
+          </a:prstGeom>
+        </p:spPr>
+      </p:pic>
+      <p:sp>
+        <p:nvSpPr>
+          <p:cNvPr id="14" name="">
+            <a:extLst xmlns:a="http://schemas.openxmlformats.org/drawingml/2006/main">
+              <a:ext uri="{FF2B5EF4-FFF2-40B4-BE49-F238E27FC236}">
+                <a16:creationId xmlns:a16="http://schemas.microsoft.com/office/drawing/2014/main" id="{6A6B3F1F-64E5-4946-BAC9-E6D76F11AB5A}"/>
+              </a:ext>
+            </a:extLst>
+          </p:cNvPr>
+          <p:cNvSpPr>
+            <a:spLocks xmlns:a="http://schemas.openxmlformats.org/drawingml/2006/main" noGrp="1"/>
+          </p:cNvSpPr>
+          <p:nvPr/>
+        </p:nvSpPr>
+        <p:spPr>
+          <a:xfrm xmlns:a="http://schemas.openxmlformats.org/drawingml/2006/main">
+            <a:off x="5810250" y="6115050"/>
+            <a:ext cx="2286000" cy="171450"/>
+          </a:xfrm>
+          <a:prstGeom xmlns:a="http://schemas.openxmlformats.org/drawingml/2006/main" prst="rect">
+            <a:avLst/>
+          </a:prstGeom>
+          <a:noFill xmlns:a="http://schemas.openxmlformats.org/drawingml/2006/main"/>
+          <a:ln xmlns:a="http://schemas.openxmlformats.org/drawingml/2006/main" w="0">
+            <a:noFill/>
+          </a:ln>
+        </p:spPr>
+        <p:txBody>
+          <a:bodyPr xmlns:a="http://schemas.openxmlformats.org/drawingml/2006/main">
+            <a:noAutofit/>
+          </a:bodyPr>
+          <a:lstStyle xmlns:a="http://schemas.openxmlformats.org/drawingml/2006/main"/>
+          <a:p xmlns:a="http://schemas.openxmlformats.org/drawingml/2006/main">
+            <a:pPr>
+              <a:defRPr sz="900">
+                <a:solidFill>
+                  <a:srgbClr val="526571"/>
+                </a:solidFill>
+                <a:latin typeface="Arial"/>
+                <a:ea typeface="Arial"/>
+                <a:cs typeface="Arial"/>
+              </a:defRPr>
+            </a:pPr>
+            <a:r>
+              <a:rPr sz="900">
+                <a:solidFill>
+                  <a:srgbClr val="526571"/>
+                </a:solidFill>
+                <a:latin typeface="Arial"/>
+                <a:ea typeface="Arial"/>
+                <a:cs typeface="Arial"/>
+              </a:rPr>
+              <a:t>AI-generated concept image</a:t>
             </a:r>
           </a:p>
         </p:txBody>
@@ -4254,6 +4687,7 @@
           <a:lstStyle xmlns:a="http://schemas.openxmlformats.org/drawingml/2006/main"/>
           <a:p xmlns:a="http://schemas.openxmlformats.org/drawingml/2006/main">
             <a:pPr>
+              <a:buNone/>
               <a:defRPr sz="1200" b="1">
                 <a:solidFill>
                   <a:srgbClr val="2F6079"/>
@@ -4311,6 +4745,7 @@
           <a:lstStyle xmlns:a="http://schemas.openxmlformats.org/drawingml/2006/main"/>
           <a:p xmlns:a="http://schemas.openxmlformats.org/drawingml/2006/main">
             <a:pPr>
+              <a:buNone/>
               <a:defRPr sz="1050" b="0">
                 <a:solidFill>
                   <a:srgbClr val="526571"/>
@@ -4368,6 +4803,7 @@
           <a:lstStyle xmlns:a="http://schemas.openxmlformats.org/drawingml/2006/main"/>
           <a:p xmlns:a="http://schemas.openxmlformats.org/drawingml/2006/main">
             <a:pPr>
+              <a:buNone/>
               <a:defRPr sz="1125" b="1">
                 <a:solidFill>
                   <a:srgbClr val="2F6079"/>
@@ -4425,6 +4861,7 @@
           <a:lstStyle xmlns:a="http://schemas.openxmlformats.org/drawingml/2006/main"/>
           <a:p xmlns:a="http://schemas.openxmlformats.org/drawingml/2006/main">
             <a:pPr>
+              <a:buNone/>
               <a:defRPr sz="2850" b="1">
                 <a:solidFill>
                   <a:srgbClr val="18303F"/>
@@ -4482,6 +4919,7 @@
           <a:lstStyle xmlns:a="http://schemas.openxmlformats.org/drawingml/2006/main"/>
           <a:p xmlns:a="http://schemas.openxmlformats.org/drawingml/2006/main">
             <a:pPr>
+              <a:buNone/>
               <a:defRPr sz="1875" b="0">
                 <a:solidFill>
                   <a:srgbClr val="18303F"/>
@@ -4510,6 +4948,7 @@
           </a:p>
           <a:p xmlns:a="http://schemas.openxmlformats.org/drawingml/2006/main">
             <a:pPr>
+              <a:buNone/>
               <a:defRPr sz="1875" b="0">
                 <a:solidFill>
                   <a:srgbClr val="18303F"/>
@@ -4549,8 +4988,8 @@
         </p:nvSpPr>
         <p:spPr>
           <a:xfrm xmlns:a="http://schemas.openxmlformats.org/drawingml/2006/main">
-            <a:off x="5810250" y="1962150"/>
-            <a:ext cx="5857875" cy="3238500"/>
+            <a:off x="5810250" y="1714500"/>
+            <a:ext cx="5857875" cy="2876550"/>
           </a:xfrm>
           <a:prstGeom xmlns:a="http://schemas.openxmlformats.org/drawingml/2006/main" prst="rect">
             <a:avLst/>
@@ -4565,20 +5004,21 @@
       </p:sp>
       <p:pic>
         <p:nvPicPr>
-          <p:cNvPr id="18" name=""/>
+          <p:cNvPr id="22" name=""/>
           <p:cNvPicPr>
             <a:picLocks xmlns:a="http://schemas.openxmlformats.org/drawingml/2006/main" noChangeAspect="1"/>
           </p:cNvPicPr>
           <p:nvPr/>
         </p:nvPicPr>
         <p:blipFill>
-          <a:blip xmlns:r="http://schemas.openxmlformats.org/officeDocument/2006/relationships" xmlns:a="http://schemas.openxmlformats.org/drawingml/2006/main" r:embed="R8a70446edb17404b"/>
+          <a:blip xmlns:r="http://schemas.openxmlformats.org/officeDocument/2006/relationships" xmlns:a="http://schemas.openxmlformats.org/drawingml/2006/main" r:embed="R0b6e41c34ddd40cc"/>
+          <a:srcRect xmlns:a="http://schemas.openxmlformats.org/drawingml/2006/main" l="0" t="0" r="0" b="0"/>
           <a:stretch xmlns:a="http://schemas.openxmlformats.org/drawingml/2006/main"/>
         </p:blipFill>
         <p:spPr>
           <a:xfrm xmlns:a="http://schemas.openxmlformats.org/drawingml/2006/main">
-            <a:off x="5998243" y="2038350"/>
-            <a:ext cx="5481888" cy="3086100"/>
+            <a:off x="6319697" y="1790700"/>
+            <a:ext cx="4838982" cy="2724150"/>
           </a:xfrm>
           <a:prstGeom xmlns:a="http://schemas.openxmlformats.org/drawingml/2006/main" prst="rect">
             <a:avLst/>
@@ -4601,8 +5041,8 @@
         </p:nvSpPr>
         <p:spPr>
           <a:xfrm xmlns:a="http://schemas.openxmlformats.org/drawingml/2006/main">
-            <a:off x="5838825" y="5324475"/>
-            <a:ext cx="5810250" cy="600075"/>
+            <a:off x="8096250" y="4819650"/>
+            <a:ext cx="3571875" cy="1257300"/>
           </a:xfrm>
           <a:prstGeom xmlns:a="http://schemas.openxmlformats.org/drawingml/2006/main" prst="rect">
             <a:avLst/>
@@ -4619,9 +5059,10 @@
           <a:lstStyle xmlns:a="http://schemas.openxmlformats.org/drawingml/2006/main"/>
           <a:p xmlns:a="http://schemas.openxmlformats.org/drawingml/2006/main">
             <a:pPr>
+              <a:buNone/>
               <a:defRPr sz="1125" b="0">
                 <a:solidFill>
-                  <a:srgbClr val="526571"/>
+                  <a:srgbClr val="18303F"/>
                 </a:solidFill>
                 <a:latin typeface="Arial"/>
                 <a:ea typeface="Arial"/>
@@ -4631,7 +5072,7 @@
             <a:r>
               <a:rPr sz="1125" b="0">
                 <a:solidFill>
-                  <a:srgbClr val="526571"/>
+                  <a:srgbClr val="18303F"/>
                 </a:solidFill>
                 <a:latin typeface="Arial"/>
                 <a:ea typeface="Arial"/>
@@ -4676,6 +5117,7 @@
           <a:lstStyle xmlns:a="http://schemas.openxmlformats.org/drawingml/2006/main"/>
           <a:p xmlns:a="http://schemas.openxmlformats.org/drawingml/2006/main">
             <a:pPr>
+              <a:buNone/>
               <a:defRPr sz="1725" b="1">
                 <a:solidFill>
                   <a:srgbClr val="2F6079"/>
@@ -4695,6 +5137,85 @@
                 <a:cs typeface="Arial"/>
               </a:rPr>
               <a:t>What would prevent an older output file being mistaken for the current revision?</a:t>
+            </a:r>
+          </a:p>
+        </p:txBody>
+      </p:sp>
+      <p:pic>
+        <p:nvPicPr>
+          <p:cNvPr id="25" name=""/>
+          <p:cNvPicPr>
+            <a:picLocks xmlns:a="http://schemas.openxmlformats.org/drawingml/2006/main" noChangeAspect="1"/>
+          </p:cNvPicPr>
+          <p:nvPr/>
+        </p:nvPicPr>
+        <p:blipFill>
+          <a:blip xmlns:r="http://schemas.openxmlformats.org/officeDocument/2006/relationships" xmlns:a="http://schemas.openxmlformats.org/drawingml/2006/main" r:embed="Ra5599a92ac5940f2"/>
+          <a:stretch xmlns:a="http://schemas.openxmlformats.org/drawingml/2006/main"/>
+        </p:blipFill>
+        <p:spPr>
+          <a:xfrm xmlns:a="http://schemas.openxmlformats.org/drawingml/2006/main">
+            <a:off x="5826919" y="4762500"/>
+            <a:ext cx="2014538" cy="1343025"/>
+          </a:xfrm>
+          <a:prstGeom xmlns:a="http://schemas.openxmlformats.org/drawingml/2006/main" prst="rect">
+            <a:avLst/>
+          </a:prstGeom>
+        </p:spPr>
+      </p:pic>
+      <p:sp>
+        <p:nvSpPr>
+          <p:cNvPr id="14" name="">
+            <a:extLst xmlns:a="http://schemas.openxmlformats.org/drawingml/2006/main">
+              <a:ext uri="{FF2B5EF4-FFF2-40B4-BE49-F238E27FC236}">
+                <a16:creationId xmlns:a16="http://schemas.microsoft.com/office/drawing/2014/main" id="{A5459852-9B49-4439-B707-3E499D114874}"/>
+              </a:ext>
+            </a:extLst>
+          </p:cNvPr>
+          <p:cNvSpPr>
+            <a:spLocks xmlns:a="http://schemas.openxmlformats.org/drawingml/2006/main" noGrp="1"/>
+          </p:cNvSpPr>
+          <p:nvPr/>
+        </p:nvSpPr>
+        <p:spPr>
+          <a:xfrm xmlns:a="http://schemas.openxmlformats.org/drawingml/2006/main">
+            <a:off x="5810250" y="6115050"/>
+            <a:ext cx="2286000" cy="171450"/>
+          </a:xfrm>
+          <a:prstGeom xmlns:a="http://schemas.openxmlformats.org/drawingml/2006/main" prst="rect">
+            <a:avLst/>
+          </a:prstGeom>
+          <a:noFill xmlns:a="http://schemas.openxmlformats.org/drawingml/2006/main"/>
+          <a:ln xmlns:a="http://schemas.openxmlformats.org/drawingml/2006/main" w="0">
+            <a:noFill/>
+          </a:ln>
+        </p:spPr>
+        <p:txBody>
+          <a:bodyPr xmlns:a="http://schemas.openxmlformats.org/drawingml/2006/main">
+            <a:noAutofit/>
+          </a:bodyPr>
+          <a:lstStyle xmlns:a="http://schemas.openxmlformats.org/drawingml/2006/main"/>
+          <a:p xmlns:a="http://schemas.openxmlformats.org/drawingml/2006/main">
+            <a:pPr>
+              <a:defRPr sz="900">
+                <a:solidFill>
+                  <a:srgbClr val="526571"/>
+                </a:solidFill>
+                <a:latin typeface="Arial"/>
+                <a:ea typeface="Arial"/>
+                <a:cs typeface="Arial"/>
+              </a:defRPr>
+            </a:pPr>
+            <a:r>
+              <a:rPr sz="900">
+                <a:solidFill>
+                  <a:srgbClr val="526571"/>
+                </a:solidFill>
+                <a:latin typeface="Arial"/>
+                <a:ea typeface="Arial"/>
+                <a:cs typeface="Arial"/>
+              </a:rPr>
+              <a:t>AI-generated concept image</a:t>
             </a:r>
           </a:p>
         </p:txBody>
@@ -4792,6 +5313,7 @@
           <a:lstStyle xmlns:a="http://schemas.openxmlformats.org/drawingml/2006/main"/>
           <a:p xmlns:a="http://schemas.openxmlformats.org/drawingml/2006/main">
             <a:pPr>
+              <a:buNone/>
               <a:defRPr sz="1200" b="1">
                 <a:solidFill>
                   <a:srgbClr val="2F6079"/>
@@ -4849,6 +5371,7 @@
           <a:lstStyle xmlns:a="http://schemas.openxmlformats.org/drawingml/2006/main"/>
           <a:p xmlns:a="http://schemas.openxmlformats.org/drawingml/2006/main">
             <a:pPr>
+              <a:buNone/>
               <a:defRPr sz="1050" b="0">
                 <a:solidFill>
                   <a:srgbClr val="526571"/>
@@ -4906,6 +5429,7 @@
           <a:lstStyle xmlns:a="http://schemas.openxmlformats.org/drawingml/2006/main"/>
           <a:p xmlns:a="http://schemas.openxmlformats.org/drawingml/2006/main">
             <a:pPr>
+              <a:buNone/>
               <a:defRPr sz="1125" b="1">
                 <a:solidFill>
                   <a:srgbClr val="2F6079"/>
@@ -4963,6 +5487,7 @@
           <a:lstStyle xmlns:a="http://schemas.openxmlformats.org/drawingml/2006/main"/>
           <a:p xmlns:a="http://schemas.openxmlformats.org/drawingml/2006/main">
             <a:pPr>
+              <a:buNone/>
               <a:defRPr sz="3225" b="1">
                 <a:solidFill>
                   <a:srgbClr val="18303F"/>
@@ -5020,6 +5545,7 @@
           <a:lstStyle xmlns:a="http://schemas.openxmlformats.org/drawingml/2006/main"/>
           <a:p xmlns:a="http://schemas.openxmlformats.org/drawingml/2006/main">
             <a:pPr>
+              <a:buNone/>
               <a:defRPr sz="2400" b="1">
                 <a:solidFill>
                   <a:srgbClr val="2F6079"/>
@@ -5060,7 +5586,7 @@
         <p:spPr>
           <a:xfrm xmlns:a="http://schemas.openxmlformats.org/drawingml/2006/main">
             <a:off x="1352550" y="2124075"/>
-            <a:ext cx="10096500" cy="914400"/>
+            <a:ext cx="5619750" cy="1143000"/>
           </a:xfrm>
           <a:prstGeom xmlns:a="http://schemas.openxmlformats.org/drawingml/2006/main" prst="rect">
             <a:avLst/>
@@ -5077,7 +5603,8 @@
           <a:lstStyle xmlns:a="http://schemas.openxmlformats.org/drawingml/2006/main"/>
           <a:p xmlns:a="http://schemas.openxmlformats.org/drawingml/2006/main">
             <a:pPr>
-              <a:defRPr sz="2100" b="0">
+              <a:buNone/>
+              <a:defRPr sz="2025" b="0">
                 <a:solidFill>
                   <a:srgbClr val="18303F"/>
                 </a:solidFill>
@@ -5087,7 +5614,7 @@
               </a:defRPr>
             </a:pPr>
             <a:r>
-              <a:rPr sz="2100" b="0">
+              <a:rPr sz="2025" b="0">
                 <a:solidFill>
                   <a:srgbClr val="18303F"/>
                 </a:solidFill>
@@ -5134,6 +5661,7 @@
           <a:lstStyle xmlns:a="http://schemas.openxmlformats.org/drawingml/2006/main"/>
           <a:p xmlns:a="http://schemas.openxmlformats.org/drawingml/2006/main">
             <a:pPr>
+              <a:buNone/>
               <a:defRPr sz="2400" b="1">
                 <a:solidFill>
                   <a:srgbClr val="2F6079"/>
@@ -5174,7 +5702,7 @@
         <p:spPr>
           <a:xfrm xmlns:a="http://schemas.openxmlformats.org/drawingml/2006/main">
             <a:off x="1352550" y="3276600"/>
-            <a:ext cx="10096500" cy="914400"/>
+            <a:ext cx="5619750" cy="1143000"/>
           </a:xfrm>
           <a:prstGeom xmlns:a="http://schemas.openxmlformats.org/drawingml/2006/main" prst="rect">
             <a:avLst/>
@@ -5191,7 +5719,8 @@
           <a:lstStyle xmlns:a="http://schemas.openxmlformats.org/drawingml/2006/main"/>
           <a:p xmlns:a="http://schemas.openxmlformats.org/drawingml/2006/main">
             <a:pPr>
-              <a:defRPr sz="2100" b="0">
+              <a:buNone/>
+              <a:defRPr sz="2025" b="0">
                 <a:solidFill>
                   <a:srgbClr val="18303F"/>
                 </a:solidFill>
@@ -5201,7 +5730,7 @@
               </a:defRPr>
             </a:pPr>
             <a:r>
-              <a:rPr sz="2100" b="0">
+              <a:rPr sz="2025" b="0">
                 <a:solidFill>
                   <a:srgbClr val="18303F"/>
                 </a:solidFill>
@@ -5248,6 +5777,7 @@
           <a:lstStyle xmlns:a="http://schemas.openxmlformats.org/drawingml/2006/main"/>
           <a:p xmlns:a="http://schemas.openxmlformats.org/drawingml/2006/main">
             <a:pPr>
+              <a:buNone/>
               <a:defRPr sz="2400" b="1">
                 <a:solidFill>
                   <a:srgbClr val="2F6079"/>
@@ -5288,7 +5818,7 @@
         <p:spPr>
           <a:xfrm xmlns:a="http://schemas.openxmlformats.org/drawingml/2006/main">
             <a:off x="1352550" y="4429125"/>
-            <a:ext cx="10096500" cy="914400"/>
+            <a:ext cx="5619750" cy="1143000"/>
           </a:xfrm>
           <a:prstGeom xmlns:a="http://schemas.openxmlformats.org/drawingml/2006/main" prst="rect">
             <a:avLst/>
@@ -5305,7 +5835,8 @@
           <a:lstStyle xmlns:a="http://schemas.openxmlformats.org/drawingml/2006/main"/>
           <a:p xmlns:a="http://schemas.openxmlformats.org/drawingml/2006/main">
             <a:pPr>
-              <a:defRPr sz="2100" b="0">
+              <a:buNone/>
+              <a:defRPr sz="2025" b="0">
                 <a:solidFill>
                   <a:srgbClr val="18303F"/>
                 </a:solidFill>
@@ -5315,7 +5846,7 @@
               </a:defRPr>
             </a:pPr>
             <a:r>
-              <a:rPr sz="2100" b="0">
+              <a:rPr sz="2025" b="0">
                 <a:solidFill>
                   <a:srgbClr val="18303F"/>
                 </a:solidFill>
@@ -5324,6 +5855,85 @@
                 <a:cs typeface="Arial"/>
               </a:rPr>
               <a:t>What would prevent an older output file being mistaken for the current revision?</a:t>
+            </a:r>
+          </a:p>
+        </p:txBody>
+      </p:sp>
+      <p:pic>
+        <p:nvPicPr>
+          <p:cNvPr id="26" name=""/>
+          <p:cNvPicPr>
+            <a:picLocks xmlns:a="http://schemas.openxmlformats.org/drawingml/2006/main" noChangeAspect="1"/>
+          </p:cNvPicPr>
+          <p:nvPr/>
+        </p:nvPicPr>
+        <p:blipFill>
+          <a:blip xmlns:r="http://schemas.openxmlformats.org/officeDocument/2006/relationships" xmlns:a="http://schemas.openxmlformats.org/drawingml/2006/main" r:embed="R49f2558a6a4549f6"/>
+          <a:stretch xmlns:a="http://schemas.openxmlformats.org/drawingml/2006/main"/>
+        </p:blipFill>
+        <p:spPr>
+          <a:xfrm xmlns:a="http://schemas.openxmlformats.org/drawingml/2006/main">
+            <a:off x="7620000" y="2484438"/>
+            <a:ext cx="4048125" cy="2698750"/>
+          </a:xfrm>
+          <a:prstGeom xmlns:a="http://schemas.openxmlformats.org/drawingml/2006/main" prst="rect">
+            <a:avLst/>
+          </a:prstGeom>
+        </p:spPr>
+      </p:pic>
+      <p:sp>
+        <p:nvSpPr>
+          <p:cNvPr id="14" name="">
+            <a:extLst xmlns:a="http://schemas.openxmlformats.org/drawingml/2006/main">
+              <a:ext uri="{FF2B5EF4-FFF2-40B4-BE49-F238E27FC236}">
+                <a16:creationId xmlns:a16="http://schemas.microsoft.com/office/drawing/2014/main" id="{2B65FB3F-45DF-40FF-9EBC-57B71071FF55}"/>
+              </a:ext>
+            </a:extLst>
+          </p:cNvPr>
+          <p:cNvSpPr>
+            <a:spLocks xmlns:a="http://schemas.openxmlformats.org/drawingml/2006/main" noGrp="1"/>
+          </p:cNvSpPr>
+          <p:nvPr/>
+        </p:nvSpPr>
+        <p:spPr>
+          <a:xfrm xmlns:a="http://schemas.openxmlformats.org/drawingml/2006/main">
+            <a:off x="7620000" y="5734050"/>
+            <a:ext cx="4048125" cy="171450"/>
+          </a:xfrm>
+          <a:prstGeom xmlns:a="http://schemas.openxmlformats.org/drawingml/2006/main" prst="rect">
+            <a:avLst/>
+          </a:prstGeom>
+          <a:noFill xmlns:a="http://schemas.openxmlformats.org/drawingml/2006/main"/>
+          <a:ln xmlns:a="http://schemas.openxmlformats.org/drawingml/2006/main" w="0">
+            <a:noFill/>
+          </a:ln>
+        </p:spPr>
+        <p:txBody>
+          <a:bodyPr xmlns:a="http://schemas.openxmlformats.org/drawingml/2006/main">
+            <a:noAutofit/>
+          </a:bodyPr>
+          <a:lstStyle xmlns:a="http://schemas.openxmlformats.org/drawingml/2006/main"/>
+          <a:p xmlns:a="http://schemas.openxmlformats.org/drawingml/2006/main">
+            <a:pPr>
+              <a:defRPr sz="900">
+                <a:solidFill>
+                  <a:srgbClr val="526571"/>
+                </a:solidFill>
+                <a:latin typeface="Arial"/>
+                <a:ea typeface="Arial"/>
+                <a:cs typeface="Arial"/>
+              </a:defRPr>
+            </a:pPr>
+            <a:r>
+              <a:rPr sz="900">
+                <a:solidFill>
+                  <a:srgbClr val="526571"/>
+                </a:solidFill>
+                <a:latin typeface="Arial"/>
+                <a:ea typeface="Arial"/>
+                <a:cs typeface="Arial"/>
+              </a:rPr>
+              <a:t>AI-generated concept image</a:t>
             </a:r>
           </a:p>
         </p:txBody>
@@ -5421,6 +6031,7 @@
           <a:lstStyle xmlns:a="http://schemas.openxmlformats.org/drawingml/2006/main"/>
           <a:p xmlns:a="http://schemas.openxmlformats.org/drawingml/2006/main">
             <a:pPr>
+              <a:buNone/>
               <a:defRPr sz="1200" b="1">
                 <a:solidFill>
                   <a:srgbClr val="2F6079"/>
@@ -5478,6 +6089,7 @@
           <a:lstStyle xmlns:a="http://schemas.openxmlformats.org/drawingml/2006/main"/>
           <a:p xmlns:a="http://schemas.openxmlformats.org/drawingml/2006/main">
             <a:pPr>
+              <a:buNone/>
               <a:defRPr sz="1050" b="0">
                 <a:solidFill>
                   <a:srgbClr val="526571"/>
@@ -5535,6 +6147,7 @@
           <a:lstStyle xmlns:a="http://schemas.openxmlformats.org/drawingml/2006/main"/>
           <a:p xmlns:a="http://schemas.openxmlformats.org/drawingml/2006/main">
             <a:pPr>
+              <a:buNone/>
               <a:defRPr sz="1125" b="1">
                 <a:solidFill>
                   <a:srgbClr val="2F6079"/>
@@ -5592,6 +6205,7 @@
           <a:lstStyle xmlns:a="http://schemas.openxmlformats.org/drawingml/2006/main"/>
           <a:p xmlns:a="http://schemas.openxmlformats.org/drawingml/2006/main">
             <a:pPr>
+              <a:buNone/>
               <a:defRPr sz="2925" b="1">
                 <a:solidFill>
                   <a:srgbClr val="18303F"/>
@@ -5631,8 +6245,8 @@
         </p:nvSpPr>
         <p:spPr>
           <a:xfrm xmlns:a="http://schemas.openxmlformats.org/drawingml/2006/main">
-            <a:off x="514350" y="1962150"/>
-            <a:ext cx="11049000" cy="1181100"/>
+            <a:off x="514350" y="1809750"/>
+            <a:ext cx="11049000" cy="1409700"/>
           </a:xfrm>
           <a:prstGeom xmlns:a="http://schemas.openxmlformats.org/drawingml/2006/main" prst="rect">
             <a:avLst/>
@@ -5649,6 +6263,7 @@
           <a:lstStyle xmlns:a="http://schemas.openxmlformats.org/drawingml/2006/main"/>
           <a:p xmlns:a="http://schemas.openxmlformats.org/drawingml/2006/main">
             <a:pPr>
+              <a:buNone/>
               <a:defRPr sz="2025" b="1">
                 <a:solidFill>
                   <a:srgbClr val="18303F"/>
@@ -5688,8 +6303,8 @@
         </p:nvSpPr>
         <p:spPr>
           <a:xfrm xmlns:a="http://schemas.openxmlformats.org/drawingml/2006/main">
-            <a:off x="514350" y="3476625"/>
-            <a:ext cx="742950" cy="495300"/>
+            <a:off x="514350" y="3333750"/>
+            <a:ext cx="742950" cy="666750"/>
           </a:xfrm>
           <a:prstGeom xmlns:a="http://schemas.openxmlformats.org/drawingml/2006/main" prst="rect">
             <a:avLst/>
@@ -5706,6 +6321,7 @@
           <a:lstStyle xmlns:a="http://schemas.openxmlformats.org/drawingml/2006/main"/>
           <a:p xmlns:a="http://schemas.openxmlformats.org/drawingml/2006/main">
             <a:pPr>
+              <a:buNone/>
               <a:defRPr sz="2250" b="1">
                 <a:solidFill>
                   <a:srgbClr val="2F6079"/>
@@ -5745,8 +6361,8 @@
         </p:nvSpPr>
         <p:spPr>
           <a:xfrm xmlns:a="http://schemas.openxmlformats.org/drawingml/2006/main">
-            <a:off x="1485900" y="3476625"/>
-            <a:ext cx="10001250" cy="714375"/>
+            <a:off x="1485900" y="3333750"/>
+            <a:ext cx="6191250" cy="895350"/>
           </a:xfrm>
           <a:prstGeom xmlns:a="http://schemas.openxmlformats.org/drawingml/2006/main" prst="rect">
             <a:avLst/>
@@ -5763,6 +6379,7 @@
           <a:lstStyle xmlns:a="http://schemas.openxmlformats.org/drawingml/2006/main"/>
           <a:p xmlns:a="http://schemas.openxmlformats.org/drawingml/2006/main">
             <a:pPr>
+              <a:buNone/>
               <a:defRPr sz="1800" b="0">
                 <a:solidFill>
                   <a:srgbClr val="18303F"/>
@@ -5802,8 +6419,8 @@
         </p:nvSpPr>
         <p:spPr>
           <a:xfrm xmlns:a="http://schemas.openxmlformats.org/drawingml/2006/main">
-            <a:off x="514350" y="4295775"/>
-            <a:ext cx="742950" cy="495300"/>
+            <a:off x="514350" y="4305300"/>
+            <a:ext cx="742950" cy="666750"/>
           </a:xfrm>
           <a:prstGeom xmlns:a="http://schemas.openxmlformats.org/drawingml/2006/main" prst="rect">
             <a:avLst/>
@@ -5820,6 +6437,7 @@
           <a:lstStyle xmlns:a="http://schemas.openxmlformats.org/drawingml/2006/main"/>
           <a:p xmlns:a="http://schemas.openxmlformats.org/drawingml/2006/main">
             <a:pPr>
+              <a:buNone/>
               <a:defRPr sz="2250" b="1">
                 <a:solidFill>
                   <a:srgbClr val="2F6079"/>
@@ -5859,8 +6477,8 @@
         </p:nvSpPr>
         <p:spPr>
           <a:xfrm xmlns:a="http://schemas.openxmlformats.org/drawingml/2006/main">
-            <a:off x="1485900" y="4295775"/>
-            <a:ext cx="10001250" cy="714375"/>
+            <a:off x="1485900" y="4305300"/>
+            <a:ext cx="6191250" cy="895350"/>
           </a:xfrm>
           <a:prstGeom xmlns:a="http://schemas.openxmlformats.org/drawingml/2006/main" prst="rect">
             <a:avLst/>
@@ -5877,6 +6495,7 @@
           <a:lstStyle xmlns:a="http://schemas.openxmlformats.org/drawingml/2006/main"/>
           <a:p xmlns:a="http://schemas.openxmlformats.org/drawingml/2006/main">
             <a:pPr>
+              <a:buNone/>
               <a:defRPr sz="1800" b="0">
                 <a:solidFill>
                   <a:srgbClr val="18303F"/>
@@ -5916,8 +6535,8 @@
         </p:nvSpPr>
         <p:spPr>
           <a:xfrm xmlns:a="http://schemas.openxmlformats.org/drawingml/2006/main">
-            <a:off x="514350" y="5114925"/>
-            <a:ext cx="742950" cy="495300"/>
+            <a:off x="514350" y="5276850"/>
+            <a:ext cx="742950" cy="666750"/>
           </a:xfrm>
           <a:prstGeom xmlns:a="http://schemas.openxmlformats.org/drawingml/2006/main" prst="rect">
             <a:avLst/>
@@ -5934,6 +6553,7 @@
           <a:lstStyle xmlns:a="http://schemas.openxmlformats.org/drawingml/2006/main"/>
           <a:p xmlns:a="http://schemas.openxmlformats.org/drawingml/2006/main">
             <a:pPr>
+              <a:buNone/>
               <a:defRPr sz="2250" b="1">
                 <a:solidFill>
                   <a:srgbClr val="2F6079"/>
@@ -5973,8 +6593,8 @@
         </p:nvSpPr>
         <p:spPr>
           <a:xfrm xmlns:a="http://schemas.openxmlformats.org/drawingml/2006/main">
-            <a:off x="1485900" y="5114925"/>
-            <a:ext cx="10001250" cy="714375"/>
+            <a:off x="1485900" y="5276850"/>
+            <a:ext cx="6191250" cy="895350"/>
           </a:xfrm>
           <a:prstGeom xmlns:a="http://schemas.openxmlformats.org/drawingml/2006/main" prst="rect">
             <a:avLst/>
@@ -5991,6 +6611,7 @@
           <a:lstStyle xmlns:a="http://schemas.openxmlformats.org/drawingml/2006/main"/>
           <a:p xmlns:a="http://schemas.openxmlformats.org/drawingml/2006/main">
             <a:pPr>
+              <a:buNone/>
               <a:defRPr sz="1800" b="0">
                 <a:solidFill>
                   <a:srgbClr val="18303F"/>
@@ -6010,6 +6631,85 @@
                 <a:cs typeface="Arial"/>
               </a:rPr>
               <a:t>Explain the layout, quantity and route checks that belong in the record.</a:t>
+            </a:r>
+          </a:p>
+        </p:txBody>
+      </p:sp>
+      <p:pic>
+        <p:nvPicPr>
+          <p:cNvPr id="28" name=""/>
+          <p:cNvPicPr>
+            <a:picLocks xmlns:a="http://schemas.openxmlformats.org/drawingml/2006/main" noChangeAspect="1"/>
+          </p:cNvPicPr>
+          <p:nvPr/>
+        </p:nvPicPr>
+        <p:blipFill>
+          <a:blip xmlns:r="http://schemas.openxmlformats.org/officeDocument/2006/relationships" xmlns:a="http://schemas.openxmlformats.org/drawingml/2006/main" r:embed="R5d1933fdde3b4c59"/>
+          <a:stretch xmlns:a="http://schemas.openxmlformats.org/drawingml/2006/main"/>
+        </p:blipFill>
+        <p:spPr>
+          <a:xfrm xmlns:a="http://schemas.openxmlformats.org/drawingml/2006/main">
+            <a:off x="7858125" y="3406775"/>
+            <a:ext cx="3810000" cy="2540000"/>
+          </a:xfrm>
+          <a:prstGeom xmlns:a="http://schemas.openxmlformats.org/drawingml/2006/main" prst="rect">
+            <a:avLst/>
+          </a:prstGeom>
+        </p:spPr>
+      </p:pic>
+      <p:sp>
+        <p:nvSpPr>
+          <p:cNvPr id="15" name="">
+            <a:extLst xmlns:a="http://schemas.openxmlformats.org/drawingml/2006/main">
+              <a:ext uri="{FF2B5EF4-FFF2-40B4-BE49-F238E27FC236}">
+                <a16:creationId xmlns:a16="http://schemas.microsoft.com/office/drawing/2014/main" id="{83FA15E2-459C-418F-8138-D5ACF78563A2}"/>
+              </a:ext>
+            </a:extLst>
+          </p:cNvPr>
+          <p:cNvSpPr>
+            <a:spLocks xmlns:a="http://schemas.openxmlformats.org/drawingml/2006/main" noGrp="1"/>
+          </p:cNvSpPr>
+          <p:nvPr/>
+        </p:nvSpPr>
+        <p:spPr>
+          <a:xfrm xmlns:a="http://schemas.openxmlformats.org/drawingml/2006/main">
+            <a:off x="7858125" y="6067425"/>
+            <a:ext cx="3810000" cy="171450"/>
+          </a:xfrm>
+          <a:prstGeom xmlns:a="http://schemas.openxmlformats.org/drawingml/2006/main" prst="rect">
+            <a:avLst/>
+          </a:prstGeom>
+          <a:noFill xmlns:a="http://schemas.openxmlformats.org/drawingml/2006/main"/>
+          <a:ln xmlns:a="http://schemas.openxmlformats.org/drawingml/2006/main" w="0">
+            <a:noFill/>
+          </a:ln>
+        </p:spPr>
+        <p:txBody>
+          <a:bodyPr xmlns:a="http://schemas.openxmlformats.org/drawingml/2006/main">
+            <a:noAutofit/>
+          </a:bodyPr>
+          <a:lstStyle xmlns:a="http://schemas.openxmlformats.org/drawingml/2006/main"/>
+          <a:p xmlns:a="http://schemas.openxmlformats.org/drawingml/2006/main">
+            <a:pPr>
+              <a:defRPr sz="900">
+                <a:solidFill>
+                  <a:srgbClr val="526571"/>
+                </a:solidFill>
+                <a:latin typeface="Arial"/>
+                <a:ea typeface="Arial"/>
+                <a:cs typeface="Arial"/>
+              </a:defRPr>
+            </a:pPr>
+            <a:r>
+              <a:rPr sz="900">
+                <a:solidFill>
+                  <a:srgbClr val="526571"/>
+                </a:solidFill>
+                <a:latin typeface="Arial"/>
+                <a:ea typeface="Arial"/>
+                <a:cs typeface="Arial"/>
+              </a:rPr>
+              <a:t>AI-generated concept image</a:t>
             </a:r>
           </a:p>
         </p:txBody>
@@ -6107,6 +6807,7 @@
           <a:lstStyle xmlns:a="http://schemas.openxmlformats.org/drawingml/2006/main"/>
           <a:p xmlns:a="http://schemas.openxmlformats.org/drawingml/2006/main">
             <a:pPr>
+              <a:buNone/>
               <a:defRPr sz="1200" b="1">
                 <a:solidFill>
                   <a:srgbClr val="2F6079"/>
@@ -6164,6 +6865,7 @@
           <a:lstStyle xmlns:a="http://schemas.openxmlformats.org/drawingml/2006/main"/>
           <a:p xmlns:a="http://schemas.openxmlformats.org/drawingml/2006/main">
             <a:pPr>
+              <a:buNone/>
               <a:defRPr sz="1050" b="0">
                 <a:solidFill>
                   <a:srgbClr val="526571"/>
@@ -6221,6 +6923,7 @@
           <a:lstStyle xmlns:a="http://schemas.openxmlformats.org/drawingml/2006/main"/>
           <a:p xmlns:a="http://schemas.openxmlformats.org/drawingml/2006/main">
             <a:pPr>
+              <a:buNone/>
               <a:defRPr sz="1125" b="1">
                 <a:solidFill>
                   <a:srgbClr val="2F6079"/>
@@ -6278,6 +6981,7 @@
           <a:lstStyle xmlns:a="http://schemas.openxmlformats.org/drawingml/2006/main"/>
           <a:p xmlns:a="http://schemas.openxmlformats.org/drawingml/2006/main">
             <a:pPr>
+              <a:buNone/>
               <a:defRPr sz="3225" b="1">
                 <a:solidFill>
                   <a:srgbClr val="18303F"/>
@@ -6318,7 +7022,7 @@
         <p:spPr>
           <a:xfrm xmlns:a="http://schemas.openxmlformats.org/drawingml/2006/main">
             <a:off x="514350" y="2038350"/>
-            <a:ext cx="10953750" cy="2190750"/>
+            <a:ext cx="7524750" cy="2571750"/>
           </a:xfrm>
           <a:prstGeom xmlns:a="http://schemas.openxmlformats.org/drawingml/2006/main" prst="rect">
             <a:avLst/>
@@ -6347,8 +7051,8 @@
         </p:nvSpPr>
         <p:spPr>
           <a:xfrm xmlns:a="http://schemas.openxmlformats.org/drawingml/2006/main">
-            <a:off x="800100" y="2314575"/>
-            <a:ext cx="10334625" cy="1647825"/>
+            <a:off x="800100" y="2247900"/>
+            <a:ext cx="6953250" cy="2238375"/>
           </a:xfrm>
           <a:prstGeom xmlns:a="http://schemas.openxmlformats.org/drawingml/2006/main" prst="rect">
             <a:avLst/>
@@ -6365,7 +7069,8 @@
           <a:lstStyle xmlns:a="http://schemas.openxmlformats.org/drawingml/2006/main"/>
           <a:p xmlns:a="http://schemas.openxmlformats.org/drawingml/2006/main">
             <a:pPr>
-              <a:defRPr sz="2325" b="1">
+              <a:buNone/>
+              <a:defRPr sz="2100" b="1">
                 <a:solidFill>
                   <a:srgbClr val="18303F"/>
                 </a:solidFill>
@@ -6375,7 +7080,7 @@
               </a:defRPr>
             </a:pPr>
             <a:r>
-              <a:rPr sz="2325" b="1">
+              <a:rPr sz="2100" b="1">
                 <a:solidFill>
                   <a:srgbClr val="18303F"/>
                 </a:solidFill>
@@ -6388,7 +7093,8 @@
           </a:p>
           <a:p xmlns:a="http://schemas.openxmlformats.org/drawingml/2006/main">
             <a:pPr>
-              <a:defRPr sz="2325" b="1">
+              <a:buNone/>
+              <a:defRPr sz="2100" b="1">
                 <a:solidFill>
                   <a:srgbClr val="18303F"/>
                 </a:solidFill>
@@ -6398,7 +7104,7 @@
               </a:defRPr>
             </a:pPr>
             <a:r>
-              <a:rPr sz="2325" b="1">
+              <a:rPr sz="2100" b="1">
                 <a:solidFill>
                   <a:srgbClr val="18303F"/>
                 </a:solidFill>
@@ -6411,7 +7117,8 @@
           </a:p>
           <a:p xmlns:a="http://schemas.openxmlformats.org/drawingml/2006/main">
             <a:pPr>
-              <a:defRPr sz="2325" b="1">
+              <a:buNone/>
+              <a:defRPr sz="2100" b="1">
                 <a:solidFill>
                   <a:srgbClr val="18303F"/>
                 </a:solidFill>
@@ -6421,7 +7128,7 @@
               </a:defRPr>
             </a:pPr>
             <a:r>
-              <a:rPr sz="2325" b="1">
+              <a:rPr sz="2100" b="1">
                 <a:solidFill>
                   <a:srgbClr val="18303F"/>
                 </a:solidFill>
@@ -6468,6 +7175,7 @@
           <a:lstStyle xmlns:a="http://schemas.openxmlformats.org/drawingml/2006/main"/>
           <a:p xmlns:a="http://schemas.openxmlformats.org/drawingml/2006/main">
             <a:pPr>
+              <a:buNone/>
               <a:defRPr sz="2175" b="1">
                 <a:solidFill>
                   <a:srgbClr val="2F6079"/>
@@ -6525,6 +7233,7 @@
           <a:lstStyle xmlns:a="http://schemas.openxmlformats.org/drawingml/2006/main"/>
           <a:p xmlns:a="http://schemas.openxmlformats.org/drawingml/2006/main">
             <a:pPr>
+              <a:buNone/>
               <a:defRPr sz="1650" b="0">
                 <a:solidFill>
                   <a:srgbClr val="526571"/>
@@ -6544,6 +7253,85 @@
                 <a:cs typeface="Arial"/>
               </a:rPr>
               <a:t>Browser saving keeps a local copy. Export and verify a backup; follow your teacher’s submission instructions.</a:t>
+            </a:r>
+          </a:p>
+        </p:txBody>
+      </p:sp>
+      <p:pic>
+        <p:nvPicPr>
+          <p:cNvPr id="22" name=""/>
+          <p:cNvPicPr>
+            <a:picLocks xmlns:a="http://schemas.openxmlformats.org/drawingml/2006/main" noChangeAspect="1"/>
+          </p:cNvPicPr>
+          <p:nvPr/>
+        </p:nvPicPr>
+        <p:blipFill>
+          <a:blip xmlns:r="http://schemas.openxmlformats.org/officeDocument/2006/relationships" xmlns:a="http://schemas.openxmlformats.org/drawingml/2006/main" r:embed="R60925b33b32247f1"/>
+          <a:stretch xmlns:a="http://schemas.openxmlformats.org/drawingml/2006/main"/>
+        </p:blipFill>
+        <p:spPr>
+          <a:xfrm xmlns:a="http://schemas.openxmlformats.org/drawingml/2006/main">
+            <a:off x="8286750" y="2197100"/>
+            <a:ext cx="3381375" cy="2254250"/>
+          </a:xfrm>
+          <a:prstGeom xmlns:a="http://schemas.openxmlformats.org/drawingml/2006/main" prst="rect">
+            <a:avLst/>
+          </a:prstGeom>
+        </p:spPr>
+      </p:pic>
+      <p:sp>
+        <p:nvSpPr>
+          <p:cNvPr id="12" name="">
+            <a:extLst xmlns:a="http://schemas.openxmlformats.org/drawingml/2006/main">
+              <a:ext uri="{FF2B5EF4-FFF2-40B4-BE49-F238E27FC236}">
+                <a16:creationId xmlns:a16="http://schemas.microsoft.com/office/drawing/2014/main" id="{3E5B27EC-E2AF-4F14-9B0E-F3D8203753AB}"/>
+              </a:ext>
+            </a:extLst>
+          </p:cNvPr>
+          <p:cNvSpPr>
+            <a:spLocks xmlns:a="http://schemas.openxmlformats.org/drawingml/2006/main" noGrp="1"/>
+          </p:cNvSpPr>
+          <p:nvPr/>
+        </p:nvSpPr>
+        <p:spPr>
+          <a:xfrm xmlns:a="http://schemas.openxmlformats.org/drawingml/2006/main">
+            <a:off x="8286750" y="4543425"/>
+            <a:ext cx="3381375" cy="171450"/>
+          </a:xfrm>
+          <a:prstGeom xmlns:a="http://schemas.openxmlformats.org/drawingml/2006/main" prst="rect">
+            <a:avLst/>
+          </a:prstGeom>
+          <a:noFill xmlns:a="http://schemas.openxmlformats.org/drawingml/2006/main"/>
+          <a:ln xmlns:a="http://schemas.openxmlformats.org/drawingml/2006/main" w="0">
+            <a:noFill/>
+          </a:ln>
+        </p:spPr>
+        <p:txBody>
+          <a:bodyPr xmlns:a="http://schemas.openxmlformats.org/drawingml/2006/main">
+            <a:noAutofit/>
+          </a:bodyPr>
+          <a:lstStyle xmlns:a="http://schemas.openxmlformats.org/drawingml/2006/main"/>
+          <a:p xmlns:a="http://schemas.openxmlformats.org/drawingml/2006/main">
+            <a:pPr>
+              <a:defRPr sz="900">
+                <a:solidFill>
+                  <a:srgbClr val="526571"/>
+                </a:solidFill>
+                <a:latin typeface="Arial"/>
+                <a:ea typeface="Arial"/>
+                <a:cs typeface="Arial"/>
+              </a:defRPr>
+            </a:pPr>
+            <a:r>
+              <a:rPr sz="900">
+                <a:solidFill>
+                  <a:srgbClr val="526571"/>
+                </a:solidFill>
+                <a:latin typeface="Arial"/>
+                <a:ea typeface="Arial"/>
+                <a:cs typeface="Arial"/>
+              </a:rPr>
+              <a:t>AI-generated concept image</a:t>
             </a:r>
           </a:p>
         </p:txBody>
